--- a/docs/pitch-decks/design-partner/pptx/60-anthropic.pptx
+++ b/docs/pitch-decks/design-partner/pptx/60-anthropic.pptx
@@ -1765,7 +1765,7 @@
                   <a:srgbClr val="8B8FA3"/>
                 </a:solidFill>
               </a:rPr>
-              <a:t>Clinical decision support with HIPAA-compliant audit trails</a:t>
+              <a:t>Governed AI deployment for Anthropic Claude Integration</a:t>
             </a:r>
             <a:endParaRPr lang="en-US" sz="1200" dirty="0"/>
           </a:p>
@@ -1995,7 +1995,7 @@
                   <a:srgbClr val="FFFFFF"/>
                 </a:solidFill>
               </a:rPr>
-              <a:t>"Anthropic Claude Integration AI has no accountability layer. Clinical decisions need explainable, auditable AI — with patient safety as the prime directive."</a:t>
+              <a:t>"Anthropic Claude Integration succeeds only when teams can prove what the model saw, who approved the action, and how decisions changed over time."</a:t>
             </a:r>
             <a:endParaRPr lang="en-US" sz="2200" dirty="0"/>
           </a:p>
@@ -2715,7 +2715,7 @@
                   <a:srgbClr val="8B8FA3"/>
                 </a:solidFill>
               </a:rPr>
-              <a:t>Clinical systems integration and health informatics</a:t>
+              <a:t>Anthropic Claude Integration integration with full traceability and replay</a:t>
             </a:r>
             <a:endParaRPr lang="en-US" sz="1200" dirty="0"/>
           </a:p>
@@ -2733,7 +2733,7 @@
                   <a:srgbClr val="8B8FA3"/>
                 </a:solidFill>
               </a:rPr>
-              <a:t>Safety metrics, adverse event prevention</a:t>
+              <a:t>Policy controls across cloud, on-prem, and sovereign environments</a:t>
             </a:r>
             <a:endParaRPr lang="en-US" sz="1200" dirty="0"/>
           </a:p>
@@ -2751,7 +2751,7 @@
                   <a:srgbClr val="8B8FA3"/>
                 </a:solidFill>
               </a:rPr>
-              <a:t>HIPAA, FDA, CMS regulatory compliance</a:t>
+              <a:t>Evidence exports for security, compliance, and platform teams</a:t>
             </a:r>
             <a:endParaRPr lang="en-US" sz="1200" dirty="0"/>
           </a:p>
@@ -3039,7 +3039,7 @@
                   <a:srgbClr val="8B8FA3"/>
                 </a:solidFill>
               </a:rPr>
-              <a:t>Clinical protocol review — Multi-agent evaluation against safety, regulatory, and financial criteria</a:t>
+              <a:t>Anthropic Claude Integration integration pilot with governed prompts, policies, and approvals</a:t>
             </a:r>
             <a:endParaRPr lang="en-US" sz="1200" dirty="0"/>
           </a:p>
@@ -3057,7 +3057,7 @@
                   <a:srgbClr val="8B8FA3"/>
                 </a:solidFill>
               </a:rPr>
-              <a:t>Hospital M&amp;A due diligence — Clinical outcomes, compliance, financial health analysis</a:t>
+              <a:t>Connector-level access controls and immutable decision history</a:t>
             </a:r>
             <a:endParaRPr lang="en-US" sz="1200" dirty="0"/>
           </a:p>
@@ -3075,7 +3075,7 @@
                   <a:srgbClr val="8B8FA3"/>
                 </a:solidFill>
               </a:rPr>
-              <a:t>Regulatory change impact — CMS/FDA guidance mapped across operations</a:t>
+              <a:t>Change review for models, tools, and workflows before release</a:t>
             </a:r>
             <a:endParaRPr lang="en-US" sz="1200" dirty="0"/>
           </a:p>
@@ -3093,7 +3093,7 @@
                   <a:srgbClr val="8B8FA3"/>
                 </a:solidFill>
               </a:rPr>
-              <a:t>Patient safety incident review — Full decision replay with evidence preservation</a:t>
+              <a:t>Incident replay and rollback with preserved reasoning and dissent</a:t>
             </a:r>
             <a:endParaRPr lang="en-US" sz="1200" dirty="0"/>
           </a:p>
@@ -3111,7 +3111,7 @@
                   <a:srgbClr val="8B8FA3"/>
                 </a:solidFill>
               </a:rPr>
-              <a:t>Value-based care optimization — Balance quality, outcomes, and financial sustainability</a:t>
+              <a:t>Operations, security, and compliance teams aligned on one evidence chain</a:t>
             </a:r>
             <a:endParaRPr lang="en-US" sz="1200" dirty="0"/>
           </a:p>
